--- a/11차시_Pico2W_WiFi.pptx
+++ b/11차시_Pico2W_WiFi.pptx
@@ -16001,7 +16001,7 @@
                 </a:solidFill>
                 <a:latin typeface="Consolas"/>
               </a:rPr>
-              <a:t>s.bind(('', 80))</a:t>
+              <a:t>s.bind(('0.0.0.0', 80))</a:t>
             </a:r>
           </a:p>
         </p:txBody>
